--- a/Final Project Presentation Template.pptx
+++ b/Final Project Presentation Template.pptx
@@ -15,9 +15,9 @@
     <p:sldId id="260" r:id="rId6"/>
     <p:sldId id="261" r:id="rId7"/>
     <p:sldId id="262" r:id="rId8"/>
-    <p:sldId id="266" r:id="rId9"/>
-    <p:sldId id="263" r:id="rId10"/>
-    <p:sldId id="265" r:id="rId11"/>
+    <p:sldId id="265" r:id="rId9"/>
+    <p:sldId id="266" r:id="rId10"/>
+    <p:sldId id="263" r:id="rId11"/>
   </p:sldIdLst>
   <p:sldSz cx="9144000" cy="5143500" type="screen16x9"/>
   <p:notesSz cx="6858000" cy="9144000"/>
@@ -6289,56 +6289,6 @@
           </a:p>
         </p:txBody>
       </p:sp>
-      <p:sp>
-        <p:nvSpPr>
-          <p:cNvPr id="56" name="Google Shape;56;p13"/>
-          <p:cNvSpPr txBox="1"/>
-          <p:nvPr/>
-        </p:nvSpPr>
-        <p:spPr>
-          <a:xfrm>
-            <a:off x="2563800" y="4494625"/>
-            <a:ext cx="4016400" cy="443100"/>
-          </a:xfrm>
-          <a:prstGeom prst="rect">
-            <a:avLst/>
-          </a:prstGeom>
-          <a:noFill/>
-          <a:ln>
-            <a:noFill/>
-          </a:ln>
-        </p:spPr>
-        <p:txBody>
-          <a:bodyPr spcFirstLastPara="1" wrap="square" lIns="91425" tIns="91425" rIns="91425" bIns="91425" anchor="t" anchorCtr="0">
-            <a:noAutofit/>
-          </a:bodyPr>
-          <a:lstStyle/>
-          <a:p>
-            <a:pPr marL="0" lvl="0" indent="0" algn="ctr" rtl="0">
-              <a:spcBef>
-                <a:spcPts val="0"/>
-              </a:spcBef>
-              <a:spcAft>
-                <a:spcPts val="0"/>
-              </a:spcAft>
-              <a:buNone/>
-            </a:pPr>
-            <a:r>
-              <a:rPr lang="en" sz="1800">
-                <a:solidFill>
-                  <a:schemeClr val="dk2"/>
-                </a:solidFill>
-              </a:rPr>
-              <a:t>7 minutes + 2 for the demo</a:t>
-            </a:r>
-            <a:endParaRPr sz="1800">
-              <a:solidFill>
-                <a:schemeClr val="dk2"/>
-              </a:solidFill>
-            </a:endParaRPr>
-          </a:p>
-        </p:txBody>
-      </p:sp>
     </p:spTree>
   </p:cSld>
   <p:clrMapOvr>
@@ -6352,7 +6302,7 @@
   <p:cSld>
     <p:spTree>
       <p:nvGrpSpPr>
-        <p:cNvPr id="1" name=""/>
+        <p:cNvPr id="1" name="Shape 96"/>
         <p:cNvGrpSpPr/>
         <p:nvPr/>
       </p:nvGrpSpPr>
@@ -6366,27 +6316,30 @@
       </p:grpSpPr>
       <p:sp>
         <p:nvSpPr>
-          <p:cNvPr id="2" name="Titel 1">
-            <a:extLst>
-              <a:ext uri="{FF2B5EF4-FFF2-40B4-BE49-F238E27FC236}">
-                <a16:creationId xmlns:a16="http://schemas.microsoft.com/office/drawing/2014/main" id="{34564137-D830-08EA-E3DC-04C94F931741}"/>
-              </a:ext>
-            </a:extLst>
-          </p:cNvPr>
-          <p:cNvSpPr>
+          <p:cNvPr id="97" name="Google Shape;97;p20"/>
+          <p:cNvSpPr txBox="1">
             <a:spLocks noGrp="1"/>
           </p:cNvSpPr>
           <p:nvPr>
             <p:ph type="title"/>
           </p:nvPr>
         </p:nvSpPr>
-        <p:spPr/>
+        <p:spPr>
+          <a:xfrm>
+            <a:off x="311700" y="445025"/>
+            <a:ext cx="8520600" cy="572700"/>
+          </a:xfrm>
+          <a:prstGeom prst="rect">
+            <a:avLst/>
+          </a:prstGeom>
+        </p:spPr>
         <p:txBody>
-          <a:bodyPr>
+          <a:bodyPr spcFirstLastPara="1" wrap="square" lIns="91425" tIns="91425" rIns="91425" bIns="91425" anchor="t" anchorCtr="0">
             <a:normAutofit fontScale="90000"/>
           </a:bodyPr>
           <a:lstStyle/>
           <a:p>
+            <a:pPr lvl="0"/>
             <a:r>
               <a:rPr lang="de-DE" dirty="0" err="1"/>
               <a:t>Langsmith</a:t>
@@ -6395,40 +6348,54 @@
               <a:rPr lang="de-DE" dirty="0"/>
               <a:t> Tracing</a:t>
             </a:r>
+            <a:endParaRPr dirty="0"/>
           </a:p>
         </p:txBody>
       </p:sp>
       <p:sp>
         <p:nvSpPr>
-          <p:cNvPr id="3" name="Textplatzhalter 2">
-            <a:extLst>
-              <a:ext uri="{FF2B5EF4-FFF2-40B4-BE49-F238E27FC236}">
-                <a16:creationId xmlns:a16="http://schemas.microsoft.com/office/drawing/2014/main" id="{B6DF855B-A1C6-B8AF-E8C5-5F19D89498A3}"/>
-              </a:ext>
-            </a:extLst>
-          </p:cNvPr>
-          <p:cNvSpPr>
+          <p:cNvPr id="98" name="Google Shape;98;p20"/>
+          <p:cNvSpPr txBox="1">
             <a:spLocks noGrp="1"/>
           </p:cNvSpPr>
           <p:nvPr>
             <p:ph type="body" idx="1"/>
           </p:nvPr>
         </p:nvSpPr>
-        <p:spPr/>
+        <p:spPr>
+          <a:xfrm>
+            <a:off x="311700" y="1152475"/>
+            <a:ext cx="8520600" cy="3416400"/>
+          </a:xfrm>
+          <a:prstGeom prst="rect">
+            <a:avLst/>
+          </a:prstGeom>
+        </p:spPr>
         <p:txBody>
-          <a:bodyPr/>
+          <a:bodyPr spcFirstLastPara="1" wrap="square" lIns="91425" tIns="91425" rIns="91425" bIns="91425" anchor="t" anchorCtr="0">
+            <a:normAutofit/>
+          </a:bodyPr>
           <a:lstStyle/>
           <a:p>
-            <a:endParaRPr lang="de-DE" dirty="0"/>
+            <a:pPr marL="0" lvl="0" indent="0" algn="l" rtl="0">
+              <a:spcBef>
+                <a:spcPts val="0"/>
+              </a:spcBef>
+              <a:spcAft>
+                <a:spcPts val="1200"/>
+              </a:spcAft>
+              <a:buNone/>
+            </a:pPr>
+            <a:endParaRPr dirty="0"/>
           </a:p>
         </p:txBody>
       </p:sp>
       <p:pic>
         <p:nvPicPr>
-          <p:cNvPr id="5" name="Grafik 4">
+          <p:cNvPr id="3" name="Grafik 2">
             <a:extLst>
               <a:ext uri="{FF2B5EF4-FFF2-40B4-BE49-F238E27FC236}">
-                <a16:creationId xmlns:a16="http://schemas.microsoft.com/office/drawing/2014/main" id="{13230921-253A-4672-BFEB-CFCAD4DDA5A5}"/>
+                <a16:creationId xmlns:a16="http://schemas.microsoft.com/office/drawing/2014/main" id="{7E7D6452-F2BC-37C6-F0C6-6231A0A58856}"/>
               </a:ext>
             </a:extLst>
           </p:cNvPr>
@@ -6438,15 +6405,15 @@
           <p:nvPr/>
         </p:nvPicPr>
         <p:blipFill>
-          <a:blip r:embed="rId2"/>
+          <a:blip r:embed="rId3"/>
           <a:stretch>
             <a:fillRect/>
           </a:stretch>
         </p:blipFill>
         <p:spPr>
           <a:xfrm>
-            <a:off x="-59473" y="1042323"/>
-            <a:ext cx="9144000" cy="4101177"/>
+            <a:off x="0" y="1152475"/>
+            <a:ext cx="8980450" cy="3971780"/>
           </a:xfrm>
           <a:prstGeom prst="rect">
             <a:avLst/>
@@ -6454,11 +6421,6 @@
         </p:spPr>
       </p:pic>
     </p:spTree>
-    <p:extLst>
-      <p:ext uri="{BB962C8B-B14F-4D97-AF65-F5344CB8AC3E}">
-        <p14:creationId xmlns:p14="http://schemas.microsoft.com/office/powerpoint/2010/main" val="2577219485"/>
-      </p:ext>
-    </p:extLst>
   </p:cSld>
   <p:clrMapOvr>
     <a:masterClrMapping/>
@@ -6508,6 +6470,40 @@
           </a:bodyPr>
           <a:lstStyle/>
           <a:p>
+            <a:pPr marL="114300" lvl="0" indent="0" algn="l" rtl="0">
+              <a:spcBef>
+                <a:spcPts val="0"/>
+              </a:spcBef>
+              <a:spcAft>
+                <a:spcPts val="0"/>
+              </a:spcAft>
+              <a:buSzPts val="1800"/>
+              <a:buNone/>
+            </a:pPr>
+            <a:r>
+              <a:rPr lang="de-DE" sz="2000" b="1" dirty="0"/>
+              <a:t>AI </a:t>
+            </a:r>
+            <a:r>
+              <a:rPr lang="de-DE" sz="2000" b="1" dirty="0" err="1"/>
+              <a:t>stack</a:t>
+            </a:r>
+            <a:endParaRPr lang="de-DE" sz="2000" b="1" dirty="0"/>
+          </a:p>
+          <a:p>
+            <a:pPr marL="114300" lvl="0" indent="0" algn="l" rtl="0">
+              <a:spcBef>
+                <a:spcPts val="0"/>
+              </a:spcBef>
+              <a:spcAft>
+                <a:spcPts val="0"/>
+              </a:spcAft>
+              <a:buSzPts val="1800"/>
+              <a:buNone/>
+            </a:pPr>
+            <a:endParaRPr lang="de-DE" sz="2000" b="1" dirty="0"/>
+          </a:p>
+          <a:p>
             <a:pPr marL="457200" lvl="0" indent="-342900" algn="l" rtl="0">
               <a:spcBef>
                 <a:spcPts val="0"/>
@@ -6519,86 +6515,86 @@
               <a:buChar char="●"/>
             </a:pPr>
             <a:r>
-              <a:rPr lang="de-DE" dirty="0" err="1"/>
+              <a:rPr lang="de-DE" sz="1600" dirty="0" err="1"/>
               <a:t>Pinecone</a:t>
             </a:r>
             <a:r>
-              <a:rPr lang="de-DE" dirty="0"/>
+              <a:rPr lang="de-DE" sz="1600" dirty="0"/>
               <a:t> Vector Store</a:t>
             </a:r>
           </a:p>
           <a:p>
             <a:r>
-              <a:rPr lang="de-DE" dirty="0"/>
+              <a:rPr lang="de-DE" sz="1600" dirty="0" err="1"/>
+              <a:t>LangGraph</a:t>
+            </a:r>
+            <a:r>
+              <a:rPr lang="de-DE" sz="1600" dirty="0"/>
+              <a:t> Agent</a:t>
+            </a:r>
+          </a:p>
+          <a:p>
+            <a:r>
+              <a:rPr lang="de-DE" sz="1600" dirty="0"/>
               <a:t>OpenAI LLM Model = gpt-4o-mini</a:t>
             </a:r>
           </a:p>
           <a:p>
             <a:r>
-              <a:rPr lang="de-DE" dirty="0" err="1"/>
+              <a:rPr lang="de-DE" sz="1600" dirty="0" err="1"/>
               <a:t>Ragas</a:t>
             </a:r>
             <a:r>
-              <a:rPr lang="de-DE" dirty="0"/>
+              <a:rPr lang="de-DE" sz="1600" dirty="0"/>
               <a:t> </a:t>
             </a:r>
             <a:r>
-              <a:rPr lang="de-DE" dirty="0" err="1"/>
+              <a:rPr lang="de-DE" sz="1600" dirty="0" err="1"/>
               <a:t>for</a:t>
             </a:r>
             <a:r>
-              <a:rPr lang="de-DE" dirty="0"/>
+              <a:rPr lang="de-DE" sz="1600" dirty="0"/>
               <a:t> </a:t>
             </a:r>
             <a:r>
-              <a:rPr lang="de-DE" dirty="0" err="1"/>
+              <a:rPr lang="de-DE" sz="1600" dirty="0" err="1"/>
               <a:t>evaluation</a:t>
             </a:r>
-            <a:endParaRPr lang="de-DE" dirty="0"/>
-          </a:p>
-          <a:p>
-            <a:r>
-              <a:rPr lang="de-DE" dirty="0" err="1"/>
-              <a:t>LangGraph</a:t>
-            </a:r>
-            <a:r>
-              <a:rPr lang="de-DE" dirty="0"/>
-              <a:t> Agent</a:t>
-            </a:r>
-          </a:p>
-          <a:p>
-            <a:r>
-              <a:rPr lang="de-DE" dirty="0" err="1"/>
+            <a:endParaRPr lang="de-DE" sz="1600" dirty="0"/>
+          </a:p>
+          <a:p>
+            <a:r>
+              <a:rPr lang="de-DE" sz="1600" dirty="0" err="1"/>
               <a:t>Langsmith</a:t>
             </a:r>
             <a:r>
-              <a:rPr lang="de-DE" dirty="0"/>
+              <a:rPr lang="de-DE" sz="1600" dirty="0"/>
               <a:t> Tracing</a:t>
             </a:r>
           </a:p>
           <a:p>
             <a:r>
-              <a:rPr lang="de-DE" dirty="0" err="1"/>
+              <a:rPr lang="de-DE" sz="1600" dirty="0" err="1"/>
               <a:t>Gradio</a:t>
             </a:r>
             <a:r>
-              <a:rPr lang="de-DE" dirty="0"/>
+              <a:rPr lang="de-DE" sz="1600" dirty="0"/>
               <a:t> </a:t>
             </a:r>
             <a:r>
-              <a:rPr lang="de-DE" dirty="0" err="1"/>
+              <a:rPr lang="de-DE" sz="1600" dirty="0" err="1"/>
               <a:t>for</a:t>
             </a:r>
             <a:r>
-              <a:rPr lang="de-DE" dirty="0"/>
+              <a:rPr lang="de-DE" sz="1600" dirty="0"/>
               <a:t> </a:t>
             </a:r>
             <a:r>
-              <a:rPr lang="de-DE" dirty="0" err="1"/>
+              <a:rPr lang="de-DE" sz="1600" dirty="0" err="1"/>
               <a:t>Deployment</a:t>
             </a:r>
             <a:r>
-              <a:rPr lang="de-DE" dirty="0"/>
+              <a:rPr lang="de-DE" sz="1600" dirty="0"/>
               <a:t> </a:t>
             </a:r>
           </a:p>
@@ -6853,7 +6849,23 @@
             </a:r>
             <a:r>
               <a:rPr lang="de-DE" dirty="0" err="1"/>
-              <a:t>WebVTT</a:t>
+              <a:t>WebVTT-py</a:t>
+            </a:r>
+            <a:r>
+              <a:rPr lang="de-DE" dirty="0"/>
+              <a:t> </a:t>
+            </a:r>
+            <a:r>
+              <a:rPr lang="de-DE" dirty="0" err="1"/>
+              <a:t>python</a:t>
+            </a:r>
+            <a:r>
+              <a:rPr lang="de-DE" dirty="0"/>
+              <a:t> </a:t>
+            </a:r>
+            <a:r>
+              <a:rPr lang="de-DE" dirty="0" err="1"/>
+              <a:t>module</a:t>
             </a:r>
             <a:endParaRPr lang="de-DE" dirty="0"/>
           </a:p>
@@ -7242,7 +7254,7 @@
           <a:p>
             <a:r>
               <a:rPr lang="en-US" sz="2200" dirty="0" err="1"/>
-              <a:t>prompttemplate</a:t>
+              <a:t>PromptTemplate</a:t>
             </a:r>
             <a:endParaRPr lang="en-US" sz="2200" dirty="0"/>
           </a:p>
@@ -7590,7 +7602,7 @@
         </p:blipFill>
         <p:spPr>
           <a:xfrm>
-            <a:off x="0" y="1948411"/>
+            <a:off x="0" y="1844333"/>
             <a:ext cx="8832300" cy="3195089"/>
           </a:xfrm>
           <a:prstGeom prst="rect">
@@ -7607,6 +7619,125 @@
 </file>
 
 <file path=ppt/slides/slide8.xml><?xml version="1.0" encoding="utf-8"?>
+<p:sld xmlns:a="http://schemas.openxmlformats.org/drawingml/2006/main" xmlns:r="http://schemas.openxmlformats.org/officeDocument/2006/relationships" xmlns:p="http://schemas.openxmlformats.org/presentationml/2006/main">
+  <p:cSld>
+    <p:spTree>
+      <p:nvGrpSpPr>
+        <p:cNvPr id="1" name=""/>
+        <p:cNvGrpSpPr/>
+        <p:nvPr/>
+      </p:nvGrpSpPr>
+      <p:grpSpPr>
+        <a:xfrm>
+          <a:off x="0" y="0"/>
+          <a:ext cx="0" cy="0"/>
+          <a:chOff x="0" y="0"/>
+          <a:chExt cx="0" cy="0"/>
+        </a:xfrm>
+      </p:grpSpPr>
+      <p:sp>
+        <p:nvSpPr>
+          <p:cNvPr id="2" name="Titel 1">
+            <a:extLst>
+              <a:ext uri="{FF2B5EF4-FFF2-40B4-BE49-F238E27FC236}">
+                <a16:creationId xmlns:a16="http://schemas.microsoft.com/office/drawing/2014/main" id="{34564137-D830-08EA-E3DC-04C94F931741}"/>
+              </a:ext>
+            </a:extLst>
+          </p:cNvPr>
+          <p:cNvSpPr>
+            <a:spLocks noGrp="1"/>
+          </p:cNvSpPr>
+          <p:nvPr>
+            <p:ph type="title"/>
+          </p:nvPr>
+        </p:nvSpPr>
+        <p:spPr/>
+        <p:txBody>
+          <a:bodyPr>
+            <a:normAutofit fontScale="90000"/>
+          </a:bodyPr>
+          <a:lstStyle/>
+          <a:p>
+            <a:r>
+              <a:rPr lang="de-DE" dirty="0" err="1"/>
+              <a:t>Langsmith</a:t>
+            </a:r>
+            <a:r>
+              <a:rPr lang="de-DE" dirty="0"/>
+              <a:t> Tracing</a:t>
+            </a:r>
+          </a:p>
+        </p:txBody>
+      </p:sp>
+      <p:sp>
+        <p:nvSpPr>
+          <p:cNvPr id="3" name="Textplatzhalter 2">
+            <a:extLst>
+              <a:ext uri="{FF2B5EF4-FFF2-40B4-BE49-F238E27FC236}">
+                <a16:creationId xmlns:a16="http://schemas.microsoft.com/office/drawing/2014/main" id="{B6DF855B-A1C6-B8AF-E8C5-5F19D89498A3}"/>
+              </a:ext>
+            </a:extLst>
+          </p:cNvPr>
+          <p:cNvSpPr>
+            <a:spLocks noGrp="1"/>
+          </p:cNvSpPr>
+          <p:nvPr>
+            <p:ph type="body" idx="1"/>
+          </p:nvPr>
+        </p:nvSpPr>
+        <p:spPr/>
+        <p:txBody>
+          <a:bodyPr/>
+          <a:lstStyle/>
+          <a:p>
+            <a:endParaRPr lang="de-DE" dirty="0"/>
+          </a:p>
+        </p:txBody>
+      </p:sp>
+      <p:pic>
+        <p:nvPicPr>
+          <p:cNvPr id="5" name="Grafik 4">
+            <a:extLst>
+              <a:ext uri="{FF2B5EF4-FFF2-40B4-BE49-F238E27FC236}">
+                <a16:creationId xmlns:a16="http://schemas.microsoft.com/office/drawing/2014/main" id="{13230921-253A-4672-BFEB-CFCAD4DDA5A5}"/>
+              </a:ext>
+            </a:extLst>
+          </p:cNvPr>
+          <p:cNvPicPr>
+            <a:picLocks noChangeAspect="1"/>
+          </p:cNvPicPr>
+          <p:nvPr/>
+        </p:nvPicPr>
+        <p:blipFill>
+          <a:blip r:embed="rId2"/>
+          <a:stretch>
+            <a:fillRect/>
+          </a:stretch>
+        </p:blipFill>
+        <p:spPr>
+          <a:xfrm>
+            <a:off x="-59473" y="1042323"/>
+            <a:ext cx="9144000" cy="4101177"/>
+          </a:xfrm>
+          <a:prstGeom prst="rect">
+            <a:avLst/>
+          </a:prstGeom>
+        </p:spPr>
+      </p:pic>
+    </p:spTree>
+    <p:extLst>
+      <p:ext uri="{BB962C8B-B14F-4D97-AF65-F5344CB8AC3E}">
+        <p14:creationId xmlns:p14="http://schemas.microsoft.com/office/powerpoint/2010/main" val="2577219485"/>
+      </p:ext>
+    </p:extLst>
+  </p:cSld>
+  <p:clrMapOvr>
+    <a:masterClrMapping/>
+  </p:clrMapOvr>
+</p:sld>
+</file>
+
+<file path=ppt/slides/slide9.xml><?xml version="1.0" encoding="utf-8"?>
 <p:sld xmlns:a="http://schemas.openxmlformats.org/drawingml/2006/main" xmlns:r="http://schemas.openxmlformats.org/officeDocument/2006/relationships" xmlns:p="http://schemas.openxmlformats.org/presentationml/2006/main">
   <p:cSld>
     <p:spTree>
@@ -7718,141 +7849,6 @@
         <p14:creationId xmlns:p14="http://schemas.microsoft.com/office/powerpoint/2010/main" val="4282115581"/>
       </p:ext>
     </p:extLst>
-  </p:cSld>
-  <p:clrMapOvr>
-    <a:masterClrMapping/>
-  </p:clrMapOvr>
-</p:sld>
-</file>
-
-<file path=ppt/slides/slide9.xml><?xml version="1.0" encoding="utf-8"?>
-<p:sld xmlns:a="http://schemas.openxmlformats.org/drawingml/2006/main" xmlns:r="http://schemas.openxmlformats.org/officeDocument/2006/relationships" xmlns:p="http://schemas.openxmlformats.org/presentationml/2006/main">
-  <p:cSld>
-    <p:spTree>
-      <p:nvGrpSpPr>
-        <p:cNvPr id="1" name="Shape 96"/>
-        <p:cNvGrpSpPr/>
-        <p:nvPr/>
-      </p:nvGrpSpPr>
-      <p:grpSpPr>
-        <a:xfrm>
-          <a:off x="0" y="0"/>
-          <a:ext cx="0" cy="0"/>
-          <a:chOff x="0" y="0"/>
-          <a:chExt cx="0" cy="0"/>
-        </a:xfrm>
-      </p:grpSpPr>
-      <p:sp>
-        <p:nvSpPr>
-          <p:cNvPr id="97" name="Google Shape;97;p20"/>
-          <p:cNvSpPr txBox="1">
-            <a:spLocks noGrp="1"/>
-          </p:cNvSpPr>
-          <p:nvPr>
-            <p:ph type="title"/>
-          </p:nvPr>
-        </p:nvSpPr>
-        <p:spPr>
-          <a:xfrm>
-            <a:off x="311700" y="445025"/>
-            <a:ext cx="8520600" cy="572700"/>
-          </a:xfrm>
-          <a:prstGeom prst="rect">
-            <a:avLst/>
-          </a:prstGeom>
-        </p:spPr>
-        <p:txBody>
-          <a:bodyPr spcFirstLastPara="1" wrap="square" lIns="91425" tIns="91425" rIns="91425" bIns="91425" anchor="t" anchorCtr="0">
-            <a:normAutofit fontScale="90000"/>
-          </a:bodyPr>
-          <a:lstStyle/>
-          <a:p>
-            <a:pPr lvl="0"/>
-            <a:r>
-              <a:rPr lang="de-DE" dirty="0" err="1"/>
-              <a:t>Langsmith</a:t>
-            </a:r>
-            <a:r>
-              <a:rPr lang="de-DE" dirty="0"/>
-              <a:t> Tracing</a:t>
-            </a:r>
-            <a:endParaRPr dirty="0"/>
-          </a:p>
-        </p:txBody>
-      </p:sp>
-      <p:sp>
-        <p:nvSpPr>
-          <p:cNvPr id="98" name="Google Shape;98;p20"/>
-          <p:cNvSpPr txBox="1">
-            <a:spLocks noGrp="1"/>
-          </p:cNvSpPr>
-          <p:nvPr>
-            <p:ph type="body" idx="1"/>
-          </p:nvPr>
-        </p:nvSpPr>
-        <p:spPr>
-          <a:xfrm>
-            <a:off x="311700" y="1152475"/>
-            <a:ext cx="8520600" cy="3416400"/>
-          </a:xfrm>
-          <a:prstGeom prst="rect">
-            <a:avLst/>
-          </a:prstGeom>
-        </p:spPr>
-        <p:txBody>
-          <a:bodyPr spcFirstLastPara="1" wrap="square" lIns="91425" tIns="91425" rIns="91425" bIns="91425" anchor="t" anchorCtr="0">
-            <a:normAutofit/>
-          </a:bodyPr>
-          <a:lstStyle/>
-          <a:p>
-            <a:pPr marL="0" lvl="0" indent="0" algn="l" rtl="0">
-              <a:spcBef>
-                <a:spcPts val="0"/>
-              </a:spcBef>
-              <a:spcAft>
-                <a:spcPts val="1200"/>
-              </a:spcAft>
-              <a:buNone/>
-            </a:pPr>
-            <a:r>
-              <a:rPr lang="en" dirty="0"/>
-              <a:t>Wrap up the presentation with a cool slide, it can be a screenshot of your bot, something nice you did with it, whatever.</a:t>
-            </a:r>
-            <a:endParaRPr dirty="0"/>
-          </a:p>
-        </p:txBody>
-      </p:sp>
-      <p:pic>
-        <p:nvPicPr>
-          <p:cNvPr id="3" name="Grafik 2">
-            <a:extLst>
-              <a:ext uri="{FF2B5EF4-FFF2-40B4-BE49-F238E27FC236}">
-                <a16:creationId xmlns:a16="http://schemas.microsoft.com/office/drawing/2014/main" id="{7E7D6452-F2BC-37C6-F0C6-6231A0A58856}"/>
-              </a:ext>
-            </a:extLst>
-          </p:cNvPr>
-          <p:cNvPicPr>
-            <a:picLocks noChangeAspect="1"/>
-          </p:cNvPicPr>
-          <p:nvPr/>
-        </p:nvPicPr>
-        <p:blipFill>
-          <a:blip r:embed="rId3"/>
-          <a:stretch>
-            <a:fillRect/>
-          </a:stretch>
-        </p:blipFill>
-        <p:spPr>
-          <a:xfrm>
-            <a:off x="81775" y="1760920"/>
-            <a:ext cx="9144000" cy="4223612"/>
-          </a:xfrm>
-          <a:prstGeom prst="rect">
-            <a:avLst/>
-          </a:prstGeom>
-        </p:spPr>
-      </p:pic>
-    </p:spTree>
   </p:cSld>
   <p:clrMapOvr>
     <a:masterClrMapping/>
